--- a/artifacts/speaking-portfolio-expanded/talks/dynamic-scaling/dynamic-scaling-30min-handout.pptx
+++ b/artifacts/speaking-portfolio-expanded/talks/dynamic-scaling/dynamic-scaling-30min-handout.pptx
@@ -202,7 +202,7 @@
                 <a:ea typeface="Arial"/>
                 <a:cs typeface="Arial"/>
               </a:rPr>
-              <a:t xml:space="preserve">[Presenter scripts](../packets/dynamic-scaling/script-40min.md) · [Contracts](../packets/dynamic-scaling/contracts.md) · [Walkthrough](../packets/dynamic-scaling/demo.md) · [Evidence](../packets/dynamic-scaling/evidence-bank.md)</a:t>
+              <a:t xml:space="preserve">[Presenter scripts](script-40min.md) · [Contracts](contracts.md) · [Walkthrough](demo.md) · [Evidence](evidence-bank.md)</a:t>
             </a:r>
             <a:endParaRPr lang="en-US" sz="1200"/>
           </a:p>
